--- a/deck_assets/Vanishing_Dose_Deck.pptx
+++ b/deck_assets/Vanishing_Dose_Deck.pptx
@@ -3560,7 +3560,7 @@
                 <a:ea typeface="Calibri" pitchFamily="34" charset="-122"/>
                 <a:cs typeface="Calibri" pitchFamily="34" charset="-120"/>
               </a:rPr>
-              <a:t>SMART on FHIR design, interactive Visx charts, offline execution, and CarePulse patient mobile companion preview.</a:t>
+              <a:t>Interactive Visx charts, fully offline execution, and an EHR-style concept interface with a patient mobile companion preview (illustrative mockups, not a real EHR integration).</a:t>
             </a:r>
             <a:endParaRPr lang="en-US" sz="1000" dirty="0"/>
           </a:p>
@@ -5831,48 +5831,24 @@
           </a:p>
         </p:txBody>
       </p:sp>
-      <p:pic>
-        <p:nvPicPr>
-          <p:cNvPr id="24" name="Image 4" descr="E:\Hackathons\manipal-hackathon\vanishing-dose\presentation_charts\slide5_hospital_roi_savings.png">    </p:cNvPr>
-          <p:cNvPicPr>
-            <a:picLocks noChangeAspect="1"/>
-          </p:cNvPicPr>
-          <p:nvPr/>
-        </p:nvPicPr>
-        <p:blipFill>
-          <a:blip r:embed="rId5"/>
-          <a:stretch>
-            <a:fillRect/>
-          </a:stretch>
-        </p:blipFill>
+      <p:sp>
+        <p:nvSpPr>
+          <p:cNvPr id="24" name="Shape 18"/>
+          <p:cNvSpPr/>
+          <p:nvPr/>
+        </p:nvSpPr>
         <p:spPr>
           <a:xfrm>
             <a:off x="640080" y="4709160"/>
-            <a:ext cx="5303520" cy="1600200"/>
-          </a:xfrm>
-          <a:prstGeom prst="rect">
-            <a:avLst/>
-          </a:prstGeom>
-        </p:spPr>
-      </p:pic>
-      <p:sp>
-        <p:nvSpPr>
-          <p:cNvPr id="25" name="Shape 18"/>
-          <p:cNvSpPr/>
-          <p:nvPr/>
-        </p:nvSpPr>
-        <p:spPr>
-          <a:xfrm>
-            <a:off x="6172200" y="4709160"/>
-            <a:ext cx="2606040" cy="1600200"/>
+            <a:ext cx="10881360" cy="1600200"/>
           </a:xfrm>
           <a:prstGeom prst="roundRect">
             <a:avLst>
-              <a:gd name="adj" fmla="val 3429"/>
+              <a:gd name="adj" fmla="val 4000"/>
             </a:avLst>
           </a:prstGeom>
           <a:solidFill>
-            <a:srgbClr val="161E25"/>
+            <a:srgbClr val="1B242C"/>
           </a:solidFill>
           <a:ln w="12700">
             <a:solidFill>
@@ -5884,14 +5860,14 @@
       </p:sp>
       <p:sp>
         <p:nvSpPr>
-          <p:cNvPr id="26" name="Text 19"/>
-          <p:cNvSpPr txBox="1"/>
-          <p:nvPr/>
-        </p:nvSpPr>
-        <p:spPr>
-          <a:xfrm>
-            <a:off x="6355080" y="4818888"/>
-            <a:ext cx="2240280" cy="720090"/>
+          <p:cNvPr id="25" name="Text 19"/>
+          <p:cNvSpPr txBox="1"/>
+          <p:nvPr/>
+        </p:nvSpPr>
+        <p:spPr>
+          <a:xfrm>
+            <a:off x="868680" y="4864608"/>
+            <a:ext cx="10424160" cy="292608"/>
           </a:xfrm>
           <a:prstGeom prst="rect">
             <a:avLst/>
@@ -5903,34 +5879,34 @@
           <a:bodyPr wrap="square" lIns="0" tIns="0" rIns="0" bIns="0" rtlCol="0" anchor="ctr"/>
           <a:lstStyle/>
           <a:p>
-            <a:pPr algn="l" indent="0" marL="0">
-              <a:buNone/>
-            </a:pPr>
-            <a:r>
-              <a:rPr lang="en-US" sz="2400" b="1" dirty="0">
-                <a:solidFill>
-                  <a:srgbClr val="6FBF8B"/>
+            <a:pPr indent="0" marL="0">
+              <a:buNone/>
+            </a:pPr>
+            <a:r>
+              <a:rPr lang="en-US" sz="1150" b="1" dirty="0">
+                <a:solidFill>
+                  <a:srgbClr val="D9A441"/>
                 </a:solidFill>
                 <a:latin typeface="Segoe UI" pitchFamily="34" charset="0"/>
                 <a:ea typeface="Segoe UI" pitchFamily="34" charset="-122"/>
                 <a:cs typeface="Segoe UI" pitchFamily="34" charset="-120"/>
               </a:rPr>
-              <a:t>$2.4M</a:t>
-            </a:r>
-            <a:endParaRPr lang="en-US" sz="2400" dirty="0"/>
-          </a:p>
-        </p:txBody>
-      </p:sp>
-      <p:sp>
-        <p:nvSpPr>
-          <p:cNvPr id="27" name="Text 20"/>
-          <p:cNvSpPr txBox="1"/>
-          <p:nvPr/>
-        </p:nvSpPr>
-        <p:spPr>
-          <a:xfrm>
-            <a:off x="6355080" y="5541264"/>
-            <a:ext cx="2240280" cy="274320"/>
+              <a:t>Business case: a hypothesis, not a costed projection</a:t>
+            </a:r>
+            <a:endParaRPr lang="en-US" sz="1150" dirty="0"/>
+          </a:p>
+        </p:txBody>
+      </p:sp>
+      <p:sp>
+        <p:nvSpPr>
+          <p:cNvPr id="26" name="Text 20"/>
+          <p:cNvSpPr txBox="1"/>
+          <p:nvPr/>
+        </p:nvSpPr>
+        <p:spPr>
+          <a:xfrm>
+            <a:off x="868680" y="5193792"/>
+            <a:ext cx="10424160" cy="1051560"/>
           </a:xfrm>
           <a:prstGeom prst="rect">
             <a:avLst/>
@@ -5943,10 +5919,13 @@
           <a:lstStyle/>
           <a:p>
             <a:pPr indent="0" marL="0">
-              <a:buNone/>
-            </a:pPr>
-            <a:r>
-              <a:rPr lang="en-US" sz="1150" b="1" dirty="0">
+              <a:lnSpc>
+                <a:spcPts val="1550"/>
+              </a:lnSpc>
+              <a:buNone/>
+            </a:pPr>
+            <a:r>
+              <a:rPr lang="en-US" sz="1100" dirty="0">
                 <a:solidFill>
                   <a:srgbClr val="E8EDF0"/>
                 </a:solidFill>
@@ -5954,22 +5933,22 @@
                 <a:ea typeface="Calibri" pitchFamily="34" charset="-122"/>
                 <a:cs typeface="Calibri" pitchFamily="34" charset="-120"/>
               </a:rPr>
-              <a:t>Annual Hospital Savings</a:t>
-            </a:r>
-            <a:endParaRPr lang="en-US" sz="1150" dirty="0"/>
-          </a:p>
-        </p:txBody>
-      </p:sp>
-      <p:sp>
-        <p:nvSpPr>
-          <p:cNvPr id="28" name="Text 21"/>
-          <p:cNvSpPr txBox="1"/>
-          <p:nvPr/>
-        </p:nvSpPr>
-        <p:spPr>
-          <a:xfrm>
-            <a:off x="6355080" y="5797296"/>
-            <a:ext cx="2240280" cy="480060"/>
+              <a:t>If dose escalations driven by white-coat adherence are avoided, some fraction of preventable ICU admissions and ER readmissions should follow. We have not costed this: no dollar savings or ROI figure in this deck is computed from our pipeline or from real hospital data. Validated so far: on the real CMS cohort the measured lift is +0.0 pp; on injected synthetic data the detector reaches 80% power at a 1.3 pp effect size. Turning that into a hospital P&amp;L case is future work, not a claim made here.</a:t>
+            </a:r>
+            <a:endParaRPr lang="en-US" sz="1100" dirty="0"/>
+          </a:p>
+        </p:txBody>
+      </p:sp>
+      <p:sp>
+        <p:nvSpPr>
+          <p:cNvPr id="27" name="Text 21"/>
+          <p:cNvSpPr txBox="1"/>
+          <p:nvPr/>
+        </p:nvSpPr>
+        <p:spPr>
+          <a:xfrm>
+            <a:off x="11002975" y="6446520"/>
+            <a:ext cx="914400" cy="274320"/>
           </a:xfrm>
           <a:prstGeom prst="rect">
             <a:avLst/>
@@ -5981,201 +5960,18 @@
           <a:bodyPr wrap="square" lIns="0" tIns="0" rIns="0" bIns="0" rtlCol="0" anchor="ctr"/>
           <a:lstStyle/>
           <a:p>
-            <a:pPr indent="0" marL="0">
-              <a:buNone/>
-            </a:pPr>
-            <a:r>
-              <a:rPr lang="en-US" sz="950" dirty="0">
+            <a:pPr algn="r" indent="0" marL="0">
+              <a:buNone/>
+            </a:pPr>
+            <a:r>
+              <a:rPr lang="en-US" sz="900" b="1" dirty="0">
                 <a:solidFill>
                   <a:srgbClr val="8FA0AC"/>
-                </a:solidFill>
-                <a:latin typeface="Calibri" pitchFamily="34" charset="0"/>
-                <a:ea typeface="Calibri" pitchFamily="34" charset="-122"/>
-                <a:cs typeface="Calibri" pitchFamily="34" charset="-120"/>
-              </a:rPr>
-              <a:t>Per 10,000 covered lives</a:t>
-            </a:r>
-            <a:endParaRPr lang="en-US" sz="950" dirty="0"/>
-          </a:p>
-        </p:txBody>
-      </p:sp>
-      <p:sp>
-        <p:nvSpPr>
-          <p:cNvPr id="29" name="Shape 22"/>
-          <p:cNvSpPr/>
-          <p:nvPr/>
-        </p:nvSpPr>
-        <p:spPr>
-          <a:xfrm>
-            <a:off x="8961120" y="4709160"/>
-            <a:ext cx="2560320" cy="1600200"/>
-          </a:xfrm>
-          <a:prstGeom prst="roundRect">
-            <a:avLst>
-              <a:gd name="adj" fmla="val 3429"/>
-            </a:avLst>
-          </a:prstGeom>
-          <a:solidFill>
-            <a:srgbClr val="161E25"/>
-          </a:solidFill>
-          <a:ln w="12700">
-            <a:solidFill>
-              <a:srgbClr val="243039"/>
-            </a:solidFill>
-            <a:prstDash val="solid"/>
-          </a:ln>
-        </p:spPr>
-      </p:sp>
-      <p:sp>
-        <p:nvSpPr>
-          <p:cNvPr id="30" name="Text 23"/>
-          <p:cNvSpPr txBox="1"/>
-          <p:nvPr/>
-        </p:nvSpPr>
-        <p:spPr>
-          <a:xfrm>
-            <a:off x="9144000" y="4818888"/>
-            <a:ext cx="2194560" cy="720090"/>
-          </a:xfrm>
-          <a:prstGeom prst="rect">
-            <a:avLst/>
-          </a:prstGeom>
-          <a:noFill/>
-          <a:ln/>
-        </p:spPr>
-        <p:txBody>
-          <a:bodyPr wrap="square" lIns="0" tIns="0" rIns="0" bIns="0" rtlCol="0" anchor="ctr"/>
-          <a:lstStyle/>
-          <a:p>
-            <a:pPr algn="l" indent="0" marL="0">
-              <a:buNone/>
-            </a:pPr>
-            <a:r>
-              <a:rPr lang="en-US" sz="2400" b="1" dirty="0">
-                <a:solidFill>
-                  <a:srgbClr val="D9A441"/>
                 </a:solidFill>
                 <a:latin typeface="Segoe UI" pitchFamily="34" charset="0"/>
                 <a:ea typeface="Segoe UI" pitchFamily="34" charset="-122"/>
                 <a:cs typeface="Segoe UI" pitchFamily="34" charset="-120"/>
               </a:rPr>
-              <a:t>4.2x ROI</a:t>
-            </a:r>
-            <a:endParaRPr lang="en-US" sz="2400" dirty="0"/>
-          </a:p>
-        </p:txBody>
-      </p:sp>
-      <p:sp>
-        <p:nvSpPr>
-          <p:cNvPr id="31" name="Text 24"/>
-          <p:cNvSpPr txBox="1"/>
-          <p:nvPr/>
-        </p:nvSpPr>
-        <p:spPr>
-          <a:xfrm>
-            <a:off x="9144000" y="5541264"/>
-            <a:ext cx="2194560" cy="274320"/>
-          </a:xfrm>
-          <a:prstGeom prst="rect">
-            <a:avLst/>
-          </a:prstGeom>
-          <a:noFill/>
-          <a:ln/>
-        </p:spPr>
-        <p:txBody>
-          <a:bodyPr wrap="square" lIns="0" tIns="0" rIns="0" bIns="0" rtlCol="0" anchor="ctr"/>
-          <a:lstStyle/>
-          <a:p>
-            <a:pPr indent="0" marL="0">
-              <a:buNone/>
-            </a:pPr>
-            <a:r>
-              <a:rPr lang="en-US" sz="1150" b="1" dirty="0">
-                <a:solidFill>
-                  <a:srgbClr val="E8EDF0"/>
-                </a:solidFill>
-                <a:latin typeface="Calibri" pitchFamily="34" charset="0"/>
-                <a:ea typeface="Calibri" pitchFamily="34" charset="-122"/>
-                <a:cs typeface="Calibri" pitchFamily="34" charset="-120"/>
-              </a:rPr>
-              <a:t>Health System Return</a:t>
-            </a:r>
-            <a:endParaRPr lang="en-US" sz="1150" dirty="0"/>
-          </a:p>
-        </p:txBody>
-      </p:sp>
-      <p:sp>
-        <p:nvSpPr>
-          <p:cNvPr id="32" name="Text 25"/>
-          <p:cNvSpPr txBox="1"/>
-          <p:nvPr/>
-        </p:nvSpPr>
-        <p:spPr>
-          <a:xfrm>
-            <a:off x="9144000" y="5797296"/>
-            <a:ext cx="2194560" cy="480060"/>
-          </a:xfrm>
-          <a:prstGeom prst="rect">
-            <a:avLst/>
-          </a:prstGeom>
-          <a:noFill/>
-          <a:ln/>
-        </p:spPr>
-        <p:txBody>
-          <a:bodyPr wrap="square" lIns="0" tIns="0" rIns="0" bIns="0" rtlCol="0" anchor="ctr"/>
-          <a:lstStyle/>
-          <a:p>
-            <a:pPr indent="0" marL="0">
-              <a:buNone/>
-            </a:pPr>
-            <a:r>
-              <a:rPr lang="en-US" sz="950" dirty="0">
-                <a:solidFill>
-                  <a:srgbClr val="8FA0AC"/>
-                </a:solidFill>
-                <a:latin typeface="Calibri" pitchFamily="34" charset="0"/>
-                <a:ea typeface="Calibri" pitchFamily="34" charset="-122"/>
-                <a:cs typeface="Calibri" pitchFamily="34" charset="-120"/>
-              </a:rPr>
-              <a:t>Value-based care contract gain</a:t>
-            </a:r>
-            <a:endParaRPr lang="en-US" sz="950" dirty="0"/>
-          </a:p>
-        </p:txBody>
-      </p:sp>
-      <p:sp>
-        <p:nvSpPr>
-          <p:cNvPr id="33" name="Text 26"/>
-          <p:cNvSpPr txBox="1"/>
-          <p:nvPr/>
-        </p:nvSpPr>
-        <p:spPr>
-          <a:xfrm>
-            <a:off x="11002975" y="6446520"/>
-            <a:ext cx="914400" cy="274320"/>
-          </a:xfrm>
-          <a:prstGeom prst="rect">
-            <a:avLst/>
-          </a:prstGeom>
-          <a:noFill/>
-          <a:ln/>
-        </p:spPr>
-        <p:txBody>
-          <a:bodyPr wrap="square" lIns="0" tIns="0" rIns="0" bIns="0" rtlCol="0" anchor="ctr"/>
-          <a:lstStyle/>
-          <a:p>
-            <a:pPr algn="r" indent="0" marL="0">
-              <a:buNone/>
-            </a:pPr>
-            <a:r>
-              <a:rPr lang="en-US" sz="900" b="1" dirty="0">
-                <a:solidFill>
-                  <a:srgbClr val="8FA0AC"/>
-                </a:solidFill>
-                <a:latin typeface="Segoe UI" pitchFamily="34" charset="0"/>
-                <a:ea typeface="Segoe UI" pitchFamily="34" charset="-122"/>
-                <a:cs typeface="Segoe UI" pitchFamily="34" charset="-120"/>
-              </a:rPr>
               <a:t>05 / 05</a:t>
             </a:r>
             <a:endParaRPr lang="en-US" sz="900" dirty="0"/>
@@ -6184,7 +5980,7 @@
       </p:sp>
       <p:sp>
         <p:nvSpPr>
-          <p:cNvPr id="34" name="Text 27"/>
+          <p:cNvPr id="28" name="Text 22"/>
           <p:cNvSpPr txBox="1"/>
           <p:nvPr/>
         </p:nvSpPr>
